--- a/蜂蜡布包装/包装袋模版.pptx
+++ b/蜂蜡布包装/包装袋模版.pptx
@@ -200,7 +200,7 @@
           <a:p>
             <a:fld id="{D2A48B96-639E-45A3-A0BA-2464DFDB1FAA}" type="datetimeFigureOut">
               <a:rPr lang="zh-CN" altLang="en-US" smtClean="0"/>
-              <a:t>2025/6/30</a:t>
+              <a:t>2025/7/8</a:t>
             </a:fld>
             <a:endParaRPr lang="zh-CN" altLang="en-US"/>
           </a:p>
@@ -593,7 +593,7 @@
           <a:p>
             <a:fld id="{00A27D40-843D-4766-AA3A-12CDC9D87DE9}" type="datetimeFigureOut">
               <a:rPr lang="zh-CN" altLang="en-US" smtClean="0"/>
-              <a:t>2025/6/30</a:t>
+              <a:t>2025/7/8</a:t>
             </a:fld>
             <a:endParaRPr lang="zh-CN" altLang="en-US"/>
           </a:p>
@@ -758,7 +758,7 @@
           <a:p>
             <a:fld id="{00A27D40-843D-4766-AA3A-12CDC9D87DE9}" type="datetimeFigureOut">
               <a:rPr lang="zh-CN" altLang="en-US" smtClean="0"/>
-              <a:t>2025/6/30</a:t>
+              <a:t>2025/7/8</a:t>
             </a:fld>
             <a:endParaRPr lang="zh-CN" altLang="en-US"/>
           </a:p>
@@ -933,7 +933,7 @@
           <a:p>
             <a:fld id="{00A27D40-843D-4766-AA3A-12CDC9D87DE9}" type="datetimeFigureOut">
               <a:rPr lang="zh-CN" altLang="en-US" smtClean="0"/>
-              <a:t>2025/6/30</a:t>
+              <a:t>2025/7/8</a:t>
             </a:fld>
             <a:endParaRPr lang="zh-CN" altLang="en-US"/>
           </a:p>
@@ -1098,7 +1098,7 @@
           <a:p>
             <a:fld id="{00A27D40-843D-4766-AA3A-12CDC9D87DE9}" type="datetimeFigureOut">
               <a:rPr lang="zh-CN" altLang="en-US" smtClean="0"/>
-              <a:t>2025/6/30</a:t>
+              <a:t>2025/7/8</a:t>
             </a:fld>
             <a:endParaRPr lang="zh-CN" altLang="en-US"/>
           </a:p>
@@ -1337,7 +1337,7 @@
           <a:p>
             <a:fld id="{00A27D40-843D-4766-AA3A-12CDC9D87DE9}" type="datetimeFigureOut">
               <a:rPr lang="zh-CN" altLang="en-US" smtClean="0"/>
-              <a:t>2025/6/30</a:t>
+              <a:t>2025/7/8</a:t>
             </a:fld>
             <a:endParaRPr lang="zh-CN" altLang="en-US"/>
           </a:p>
@@ -1564,7 +1564,7 @@
           <a:p>
             <a:fld id="{00A27D40-843D-4766-AA3A-12CDC9D87DE9}" type="datetimeFigureOut">
               <a:rPr lang="zh-CN" altLang="en-US" smtClean="0"/>
-              <a:t>2025/6/30</a:t>
+              <a:t>2025/7/8</a:t>
             </a:fld>
             <a:endParaRPr lang="zh-CN" altLang="en-US"/>
           </a:p>
@@ -1926,7 +1926,7 @@
           <a:p>
             <a:fld id="{00A27D40-843D-4766-AA3A-12CDC9D87DE9}" type="datetimeFigureOut">
               <a:rPr lang="zh-CN" altLang="en-US" smtClean="0"/>
-              <a:t>2025/6/30</a:t>
+              <a:t>2025/7/8</a:t>
             </a:fld>
             <a:endParaRPr lang="zh-CN" altLang="en-US"/>
           </a:p>
@@ -2039,7 +2039,7 @@
           <a:p>
             <a:fld id="{00A27D40-843D-4766-AA3A-12CDC9D87DE9}" type="datetimeFigureOut">
               <a:rPr lang="zh-CN" altLang="en-US" smtClean="0"/>
-              <a:t>2025/6/30</a:t>
+              <a:t>2025/7/8</a:t>
             </a:fld>
             <a:endParaRPr lang="zh-CN" altLang="en-US"/>
           </a:p>
@@ -2129,7 +2129,7 @@
           <a:p>
             <a:fld id="{00A27D40-843D-4766-AA3A-12CDC9D87DE9}" type="datetimeFigureOut">
               <a:rPr lang="zh-CN" altLang="en-US" smtClean="0"/>
-              <a:t>2025/6/30</a:t>
+              <a:t>2025/7/8</a:t>
             </a:fld>
             <a:endParaRPr lang="zh-CN" altLang="en-US"/>
           </a:p>
@@ -2401,7 +2401,7 @@
           <a:p>
             <a:fld id="{00A27D40-843D-4766-AA3A-12CDC9D87DE9}" type="datetimeFigureOut">
               <a:rPr lang="zh-CN" altLang="en-US" smtClean="0"/>
-              <a:t>2025/6/30</a:t>
+              <a:t>2025/7/8</a:t>
             </a:fld>
             <a:endParaRPr lang="zh-CN" altLang="en-US"/>
           </a:p>
@@ -2653,7 +2653,7 @@
           <a:p>
             <a:fld id="{00A27D40-843D-4766-AA3A-12CDC9D87DE9}" type="datetimeFigureOut">
               <a:rPr lang="zh-CN" altLang="en-US" smtClean="0"/>
-              <a:t>2025/6/30</a:t>
+              <a:t>2025/7/8</a:t>
             </a:fld>
             <a:endParaRPr lang="zh-CN" altLang="en-US"/>
           </a:p>
@@ -2861,7 +2861,7 @@
           <a:p>
             <a:fld id="{00A27D40-843D-4766-AA3A-12CDC9D87DE9}" type="datetimeFigureOut">
               <a:rPr lang="zh-CN" altLang="en-US" smtClean="0"/>
-              <a:t>2025/6/30</a:t>
+              <a:t>2025/7/8</a:t>
             </a:fld>
             <a:endParaRPr lang="zh-CN" altLang="en-US"/>
           </a:p>
@@ -3711,6 +3711,42 @@
           </a:p>
         </p:txBody>
       </p:sp>
+      <p:sp>
+        <p:nvSpPr>
+          <p:cNvPr id="2" name="TextBox 1">
+            <a:extLst>
+              <a:ext uri="{FF2B5EF4-FFF2-40B4-BE49-F238E27FC236}">
+                <a16:creationId xmlns:a16="http://schemas.microsoft.com/office/drawing/2014/main" id="{6FA79BBE-4DB2-097B-F577-4C21CD3235A4}"/>
+              </a:ext>
+            </a:extLst>
+          </p:cNvPr>
+          <p:cNvSpPr txBox="1"/>
+          <p:nvPr/>
+        </p:nvSpPr>
+        <p:spPr>
+          <a:xfrm>
+            <a:off x="444480" y="5760760"/>
+            <a:ext cx="1753395" cy="307777"/>
+          </a:xfrm>
+          <a:prstGeom prst="rect">
+            <a:avLst/>
+          </a:prstGeom>
+          <a:noFill/>
+        </p:spPr>
+        <p:txBody>
+          <a:bodyPr wrap="square" rtlCol="0">
+            <a:spAutoFit/>
+          </a:bodyPr>
+          <a:lstStyle/>
+          <a:p>
+            <a:r>
+              <a:rPr lang="en-US" sz="1400" dirty="0"/>
+              <a:t>Name</a:t>
+            </a:r>
+            <a:endParaRPr lang="en-US" dirty="0"/>
+          </a:p>
+        </p:txBody>
+      </p:sp>
     </p:spTree>
   </p:cSld>
   <p:clrMapOvr>
@@ -4196,6 +4232,42 @@
               <a:rPr lang="zh-CN" altLang="en-US" sz="1400" dirty="0"/>
               <a:t>CM</a:t>
             </a:r>
+          </a:p>
+        </p:txBody>
+      </p:sp>
+      <p:sp>
+        <p:nvSpPr>
+          <p:cNvPr id="2" name="TextBox 1">
+            <a:extLst>
+              <a:ext uri="{FF2B5EF4-FFF2-40B4-BE49-F238E27FC236}">
+                <a16:creationId xmlns:a16="http://schemas.microsoft.com/office/drawing/2014/main" id="{06E975EE-0DA7-0804-278E-1E405EBC82F0}"/>
+              </a:ext>
+            </a:extLst>
+          </p:cNvPr>
+          <p:cNvSpPr txBox="1"/>
+          <p:nvPr/>
+        </p:nvSpPr>
+        <p:spPr>
+          <a:xfrm>
+            <a:off x="434258" y="5760760"/>
+            <a:ext cx="1753395" cy="307777"/>
+          </a:xfrm>
+          <a:prstGeom prst="rect">
+            <a:avLst/>
+          </a:prstGeom>
+          <a:noFill/>
+        </p:spPr>
+        <p:txBody>
+          <a:bodyPr wrap="square" rtlCol="0">
+            <a:spAutoFit/>
+          </a:bodyPr>
+          <a:lstStyle/>
+          <a:p>
+            <a:r>
+              <a:rPr lang="en-US" sz="1400" dirty="0"/>
+              <a:t>Name</a:t>
+            </a:r>
+            <a:endParaRPr lang="en-US" dirty="0"/>
           </a:p>
         </p:txBody>
       </p:sp>
@@ -4692,6 +4764,42 @@
           </a:p>
         </p:txBody>
       </p:sp>
+      <p:sp>
+        <p:nvSpPr>
+          <p:cNvPr id="2" name="TextBox 1">
+            <a:extLst>
+              <a:ext uri="{FF2B5EF4-FFF2-40B4-BE49-F238E27FC236}">
+                <a16:creationId xmlns:a16="http://schemas.microsoft.com/office/drawing/2014/main" id="{9C8C7F95-11C9-E695-AFD0-FAF727B89BB6}"/>
+              </a:ext>
+            </a:extLst>
+          </p:cNvPr>
+          <p:cNvSpPr txBox="1"/>
+          <p:nvPr/>
+        </p:nvSpPr>
+        <p:spPr>
+          <a:xfrm>
+            <a:off x="444480" y="5760760"/>
+            <a:ext cx="1753395" cy="307777"/>
+          </a:xfrm>
+          <a:prstGeom prst="rect">
+            <a:avLst/>
+          </a:prstGeom>
+          <a:noFill/>
+        </p:spPr>
+        <p:txBody>
+          <a:bodyPr wrap="square" rtlCol="0">
+            <a:spAutoFit/>
+          </a:bodyPr>
+          <a:lstStyle/>
+          <a:p>
+            <a:r>
+              <a:rPr lang="en-US" sz="1400" dirty="0"/>
+              <a:t>Name</a:t>
+            </a:r>
+            <a:endParaRPr lang="en-US" dirty="0"/>
+          </a:p>
+        </p:txBody>
+      </p:sp>
     </p:spTree>
     <p:extLst>
       <p:ext uri="{BB962C8B-B14F-4D97-AF65-F5344CB8AC3E}">
@@ -5182,6 +5290,42 @@
               <a:rPr lang="zh-CN" altLang="en-US" sz="1400" dirty="0"/>
               <a:t>CM</a:t>
             </a:r>
+          </a:p>
+        </p:txBody>
+      </p:sp>
+      <p:sp>
+        <p:nvSpPr>
+          <p:cNvPr id="2" name="TextBox 1">
+            <a:extLst>
+              <a:ext uri="{FF2B5EF4-FFF2-40B4-BE49-F238E27FC236}">
+                <a16:creationId xmlns:a16="http://schemas.microsoft.com/office/drawing/2014/main" id="{79EF46DF-774D-D809-5C47-FF7D264F2FE1}"/>
+              </a:ext>
+            </a:extLst>
+          </p:cNvPr>
+          <p:cNvSpPr txBox="1"/>
+          <p:nvPr/>
+        </p:nvSpPr>
+        <p:spPr>
+          <a:xfrm>
+            <a:off x="444480" y="5760760"/>
+            <a:ext cx="1753395" cy="307777"/>
+          </a:xfrm>
+          <a:prstGeom prst="rect">
+            <a:avLst/>
+          </a:prstGeom>
+          <a:noFill/>
+        </p:spPr>
+        <p:txBody>
+          <a:bodyPr wrap="square" rtlCol="0">
+            <a:spAutoFit/>
+          </a:bodyPr>
+          <a:lstStyle/>
+          <a:p>
+            <a:r>
+              <a:rPr lang="en-US" sz="1400" dirty="0"/>
+              <a:t>Name</a:t>
+            </a:r>
+            <a:endParaRPr lang="en-US" dirty="0"/>
           </a:p>
         </p:txBody>
       </p:sp>
